--- a/test/I1_Query_Flow.pptx
+++ b/test/I1_Query_Flow.pptx
@@ -4341,8 +4341,9 @@
                   <a:srgbClr val="175CA6"/>
                 </a:solidFill>
               </a:rPr>
-              <a:t>prompt +
-snapshot</a:t>
+              <a:t>SYSTEM_PROMPT
++ snapshot
++ history</a:t>
             </a:r>
           </a:p>
         </p:txBody>
@@ -6029,7 +6030,7 @@
                   <a:srgbClr val="444444"/>
                 </a:solidFill>
               </a:rPr>
-              <a:t>HTTP POST {session, message} to Orchestrator /chat</a:t>
+              <a:t>HTTP POST {session_id, message} → Orchestrator /chat  (pure stdlib urllib; --session flag)</a:t>
             </a:r>
           </a:p>
         </p:txBody>
@@ -6221,7 +6222,7 @@
                   <a:srgbClr val="444444"/>
                 </a:solidFill>
               </a:rPr>
-              <a:t>Injects live network snapshot; calls Gemini</a:t>
+              <a:t>Calls build_network_context() → GET /network; appends snapshot to SYSTEM_PROMPT; sends to Gemini</a:t>
             </a:r>
           </a:p>
         </p:txBody>
@@ -6413,7 +6414,7 @@
                   <a:srgbClr val="444444"/>
                 </a:solidFill>
               </a:rPr>
-              <a:t>Tool call 1: query_network() — assess all cells</a:t>
+              <a:t>Tool call 1: query_network()  [while True loop, iteration 1]</a:t>
             </a:r>
           </a:p>
         </p:txBody>
@@ -6605,7 +6606,7 @@
                   <a:srgbClr val="444444"/>
                 </a:solidFill>
               </a:rPr>
-              <a:t>GET /network → Controller</a:t>
+              <a:t>GET /network → Controller; yields *[calling tool: query_network...]* inline</a:t>
             </a:r>
           </a:p>
         </p:txBody>
@@ -6797,7 +6798,7 @@
                   <a:srgbClr val="444444"/>
                 </a:solidFill>
               </a:rPr>
-              <a:t>topology.json + InfluxDB KPIs (PRB, SINR, UEs, throughput)</a:t>
+              <a:t>topology.json + InfluxDB KPIs (PRB, SINR, UEs, throughput); returns 30-cell snapshot</a:t>
             </a:r>
           </a:p>
         </p:txBody>
@@ -6896,7 +6897,7 @@
             <a:avLst/>
           </a:prstGeom>
           <a:solidFill>
-            <a:srgbClr val="007E8A"/>
+            <a:srgbClr val="0A2955"/>
           </a:solidFill>
           <a:ln w="3810">
             <a:solidFill>
@@ -6955,7 +6956,7 @@
                   <a:srgbClr val="FFFFFF"/>
                 </a:solidFill>
               </a:rPr>
-              <a:t>Controller</a:t>
+              <a:t>Orchestrator</a:t>
             </a:r>
           </a:p>
         </p:txBody>
@@ -6989,7 +6990,7 @@
                   <a:srgbClr val="444444"/>
                 </a:solidFill>
               </a:rPr>
-              <a:t>Returns full network snapshot</a:t>
+              <a:t>JSON-sanitises; appends FunctionResponse to session history; re-calls Gemini [iteration 2]</a:t>
             </a:r>
           </a:p>
         </p:txBody>
@@ -7088,7 +7089,7 @@
             <a:avLst/>
           </a:prstGeom>
           <a:solidFill>
-            <a:srgbClr val="0A2955"/>
+            <a:srgbClr val="5A238C"/>
           </a:solidFill>
           <a:ln w="3810">
             <a:solidFill>
@@ -7147,7 +7148,7 @@
                   <a:srgbClr val="FFFFFF"/>
                 </a:solidFill>
               </a:rPr>
-              <a:t>Orchestrator</a:t>
+              <a:t>Gemini LLM</a:t>
             </a:r>
           </a:p>
         </p:txBody>
@@ -7181,7 +7182,7 @@
                   <a:srgbClr val="444444"/>
                 </a:solidFill>
               </a:rPr>
-              <a:t>Returns snapshot to Gemini</a:t>
+              <a:t>Identifies railway station area cells: MLS_RWS_* (lat≈13.008)</a:t>
             </a:r>
           </a:p>
         </p:txBody>
@@ -7373,7 +7374,7 @@
                   <a:srgbClr val="444444"/>
                 </a:solidFill>
               </a:rPr>
-              <a:t>Identifies railway station area cells: MLS_RWS_* (lat≈13.008)</a:t>
+              <a:t>Assesses KPIs: high PRB? low SINR? UEs near max?</a:t>
             </a:r>
           </a:p>
         </p:txBody>
@@ -7565,7 +7566,7 @@
                   <a:srgbClr val="444444"/>
                 </a:solidFill>
               </a:rPr>
-              <a:t>Assesses KPIs: high PRB? low SINR? UEs near max?</a:t>
+              <a:t>Autonomously decides: move_cell (DU imbalance) or plan_network (capacity gap)</a:t>
             </a:r>
           </a:p>
         </p:txBody>
@@ -7664,7 +7665,7 @@
             <a:avLst/>
           </a:prstGeom>
           <a:solidFill>
-            <a:srgbClr val="5A238C"/>
+            <a:srgbClr val="0A2955"/>
           </a:solidFill>
           <a:ln w="3810">
             <a:solidFill>
@@ -7723,7 +7724,7 @@
                   <a:srgbClr val="FFFFFF"/>
                 </a:solidFill>
               </a:rPr>
-              <a:t>Gemini LLM</a:t>
+              <a:t>Orchestrator</a:t>
             </a:r>
           </a:p>
         </p:txBody>
@@ -7757,7 +7758,7 @@
                   <a:srgbClr val="444444"/>
                 </a:solidFill>
               </a:rPr>
-              <a:t>Decides action: move_cell (DU imbalance) or plan_network (capacity)</a:t>
+              <a:t>Executes chosen tool; yields *[calling tool...]* inline; updates topology or plan</a:t>
             </a:r>
           </a:p>
         </p:txBody>
@@ -7949,7 +7950,7 @@
                   <a:srgbClr val="444444"/>
                 </a:solidFill>
               </a:rPr>
-              <a:t>Executes chosen tool: move_cell or plan_network</a:t>
+              <a:t>JSON-sanitises result; appends to history; re-calls Gemini → loop exits</a:t>
             </a:r>
           </a:p>
         </p:txBody>
@@ -8048,7 +8049,7 @@
             <a:avLst/>
           </a:prstGeom>
           <a:solidFill>
-            <a:srgbClr val="007E8A"/>
+            <a:srgbClr val="5A238C"/>
           </a:solidFill>
           <a:ln w="3810">
             <a:solidFill>
@@ -8107,7 +8108,7 @@
                   <a:srgbClr val="FFFFFF"/>
                 </a:solidFill>
               </a:rPr>
-              <a:t>Controller</a:t>
+              <a:t>Gemini LLM</a:t>
             </a:r>
           </a:p>
         </p:txBody>
@@ -8141,7 +8142,7 @@
                   <a:srgbClr val="444444"/>
                 </a:solidFill>
               </a:rPr>
-              <a:t>Updates topology.json or generates capacity plan</a:t>
+              <a:t>Generates intent fulfilment summary with expected UX improvements</a:t>
             </a:r>
           </a:p>
         </p:txBody>
@@ -8240,198 +8241,6 @@
             <a:avLst/>
           </a:prstGeom>
           <a:solidFill>
-            <a:srgbClr val="5A238C"/>
-          </a:solidFill>
-          <a:ln w="3810">
-            <a:solidFill>
-              <a:srgbClr val="AAAAAA"/>
-            </a:solidFill>
-          </a:ln>
-        </p:spPr>
-        <p:style>
-          <a:lnRef idx="1">
-            <a:schemeClr val="accent1"/>
-          </a:lnRef>
-          <a:fillRef idx="3">
-            <a:schemeClr val="accent1"/>
-          </a:fillRef>
-          <a:effectRef idx="2">
-            <a:schemeClr val="accent1"/>
-          </a:effectRef>
-          <a:fontRef idx="minor">
-            <a:schemeClr val="lt1"/>
-          </a:fontRef>
-        </p:style>
-        <p:txBody>
-          <a:bodyPr rtlCol="0" anchor="ctr"/>
-          <a:lstStyle/>
-          <a:p>
-            <a:pPr algn="ctr"/>
-          </a:p>
-        </p:txBody>
-      </p:sp>
-      <p:sp>
-        <p:nvSpPr>
-          <p:cNvPr id="73" name="TextBox 72"/>
-          <p:cNvSpPr txBox="1"/>
-          <p:nvPr/>
-        </p:nvSpPr>
-        <p:spPr>
-          <a:xfrm>
-            <a:off x="868680" y="6208776"/>
-            <a:ext cx="1463040" cy="274320"/>
-          </a:xfrm>
-          <a:prstGeom prst="rect">
-            <a:avLst/>
-          </a:prstGeom>
-          <a:noFill/>
-        </p:spPr>
-        <p:txBody>
-          <a:bodyPr wrap="square">
-            <a:spAutoFit/>
-          </a:bodyPr>
-          <a:lstStyle/>
-          <a:p>
-            <a:pPr algn="ctr"/>
-            <a:r>
-              <a:rPr sz="900" b="1" i="0">
-                <a:solidFill>
-                  <a:srgbClr val="FFFFFF"/>
-                </a:solidFill>
-              </a:rPr>
-              <a:t>Gemini LLM</a:t>
-            </a:r>
-          </a:p>
-        </p:txBody>
-      </p:sp>
-      <p:sp>
-        <p:nvSpPr>
-          <p:cNvPr id="74" name="TextBox 73"/>
-          <p:cNvSpPr txBox="1"/>
-          <p:nvPr/>
-        </p:nvSpPr>
-        <p:spPr>
-          <a:xfrm>
-            <a:off x="2423160" y="6181344"/>
-            <a:ext cx="9418320" cy="329184"/>
-          </a:xfrm>
-          <a:prstGeom prst="rect">
-            <a:avLst/>
-          </a:prstGeom>
-          <a:noFill/>
-        </p:spPr>
-        <p:txBody>
-          <a:bodyPr wrap="square">
-            <a:spAutoFit/>
-          </a:bodyPr>
-          <a:lstStyle/>
-          <a:p>
-            <a:pPr algn="l"/>
-            <a:r>
-              <a:rPr sz="1000" b="0" i="0">
-                <a:solidFill>
-                  <a:srgbClr val="444444"/>
-                </a:solidFill>
-              </a:rPr>
-              <a:t>Generates intent fulfilment summary with expected improvements</a:t>
-            </a:r>
-          </a:p>
-        </p:txBody>
-      </p:sp>
-      <p:sp>
-        <p:nvSpPr>
-          <p:cNvPr id="75" name="Rectangle 74"/>
-          <p:cNvSpPr/>
-          <p:nvPr/>
-        </p:nvSpPr>
-        <p:spPr>
-          <a:xfrm>
-            <a:off x="274320" y="6547104"/>
-            <a:ext cx="11612880" cy="402336"/>
-          </a:xfrm>
-          <a:prstGeom prst="rect">
-            <a:avLst/>
-          </a:prstGeom>
-          <a:solidFill>
-            <a:srgbClr val="FFFFFF"/>
-          </a:solidFill>
-          <a:ln w="3810">
-            <a:solidFill>
-              <a:srgbClr val="CCCCCC"/>
-            </a:solidFill>
-          </a:ln>
-        </p:spPr>
-        <p:style>
-          <a:lnRef idx="1">
-            <a:schemeClr val="accent1"/>
-          </a:lnRef>
-          <a:fillRef idx="3">
-            <a:schemeClr val="accent1"/>
-          </a:fillRef>
-          <a:effectRef idx="2">
-            <a:schemeClr val="accent1"/>
-          </a:effectRef>
-          <a:fontRef idx="minor">
-            <a:schemeClr val="lt1"/>
-          </a:fontRef>
-        </p:style>
-        <p:txBody>
-          <a:bodyPr rtlCol="0" anchor="ctr"/>
-          <a:lstStyle/>
-          <a:p>
-            <a:pPr algn="ctr"/>
-          </a:p>
-        </p:txBody>
-      </p:sp>
-      <p:sp>
-        <p:nvSpPr>
-          <p:cNvPr id="76" name="TextBox 75"/>
-          <p:cNvSpPr txBox="1"/>
-          <p:nvPr/>
-        </p:nvSpPr>
-        <p:spPr>
-          <a:xfrm>
-            <a:off x="320040" y="6583680"/>
-            <a:ext cx="502920" cy="329184"/>
-          </a:xfrm>
-          <a:prstGeom prst="rect">
-            <a:avLst/>
-          </a:prstGeom>
-          <a:noFill/>
-        </p:spPr>
-        <p:txBody>
-          <a:bodyPr wrap="square">
-            <a:spAutoFit/>
-          </a:bodyPr>
-          <a:lstStyle/>
-          <a:p>
-            <a:pPr algn="ctr"/>
-            <a:r>
-              <a:rPr sz="1100" b="1" i="0">
-                <a:solidFill>
-                  <a:srgbClr val="0A2955"/>
-                </a:solidFill>
-              </a:rPr>
-              <a:t>15</a:t>
-            </a:r>
-          </a:p>
-        </p:txBody>
-      </p:sp>
-      <p:sp>
-        <p:nvSpPr>
-          <p:cNvPr id="77" name="Rectangle 76"/>
-          <p:cNvSpPr/>
-          <p:nvPr/>
-        </p:nvSpPr>
-        <p:spPr>
-          <a:xfrm>
-            <a:off x="868680" y="6611112"/>
-            <a:ext cx="1463040" cy="274320"/>
-          </a:xfrm>
-          <a:prstGeom prst="rect">
-            <a:avLst/>
-          </a:prstGeom>
-          <a:solidFill>
             <a:srgbClr val="0A2955"/>
           </a:solidFill>
           <a:ln w="3810">
@@ -8464,13 +8273,13 @@
       </p:sp>
       <p:sp>
         <p:nvSpPr>
-          <p:cNvPr id="78" name="TextBox 77"/>
+          <p:cNvPr id="73" name="TextBox 72"/>
           <p:cNvSpPr txBox="1"/>
           <p:nvPr/>
         </p:nvSpPr>
         <p:spPr>
           <a:xfrm>
-            <a:off x="868680" y="6611112"/>
+            <a:off x="868680" y="6208776"/>
             <a:ext cx="1463040" cy="274320"/>
           </a:xfrm>
           <a:prstGeom prst="rect">
@@ -8498,13 +8307,13 @@
       </p:sp>
       <p:sp>
         <p:nvSpPr>
-          <p:cNvPr id="79" name="TextBox 78"/>
+          <p:cNvPr id="74" name="TextBox 73"/>
           <p:cNvSpPr txBox="1"/>
           <p:nvPr/>
         </p:nvSpPr>
         <p:spPr>
           <a:xfrm>
-            <a:off x="2423160" y="6583680"/>
+            <a:off x="2423160" y="6181344"/>
             <a:ext cx="9418320" cy="329184"/>
           </a:xfrm>
           <a:prstGeom prst="rect">
@@ -8525,7 +8334,7 @@
                   <a:srgbClr val="444444"/>
                 </a:solidFill>
               </a:rPr>
-              <a:t>Returns HTTP response {reply} to chat.py</a:t>
+              <a:t>Streams text/plain chunks via sync generator (StreamingResponse)</a:t>
             </a:r>
           </a:p>
         </p:txBody>
